--- a/my_folder/Presentation (1).pptx
+++ b/my_folder/Presentation (1).pptx
@@ -1,15 +1,15 @@
 
 <file path=ppt/presentation.xml><?xml version="1.0" encoding="utf-8"?>
-<p:presentation xmlns:a="http://schemas.openxmlformats.org/drawingml/2006/main" xmlns:r="http://schemas.openxmlformats.org/officeDocument/2006/relationships" xmlns:p="http://schemas.openxmlformats.org/presentationml/2006/main" saveSubsetFonts="1">
+<p:presentation xmlns:a="http://schemas.openxmlformats.org/drawingml/2006/main" xmlns:r="http://schemas.openxmlformats.org/officeDocument/2006/relationships" xmlns:p="http://schemas.openxmlformats.org/presentationml/2006/main">
   <p:sldMasterIdLst>
-    <p:sldMasterId id="2147483702" r:id="rId1"/>
+    <p:sldMasterId id="2147483648" r:id="rId1"/>
   </p:sldMasterIdLst>
   <p:sldIdLst>
-    <p:sldId id="256" r:id="rId2"/>
-    <p:sldId id="257" r:id="rId3"/>
-    <p:sldId id="258" r:id="rId4"/>
-    <p:sldId id="260" r:id="rId5"/>
-    <p:sldId id="261" r:id="rId6"/>
+    <p:sldId id="256" r:id="rId3"/>
+    <p:sldId id="257" r:id="rId4"/>
+    <p:sldId id="258" r:id="rId5"/>
+    <p:sldId id="260" r:id="rId6"/>
+    <p:sldId id="261" r:id="rId7"/>
   </p:sldIdLst>
   <p:sldSz cx="12192000" cy="6858000"/>
   <p:notesSz cx="6858000" cy="9144000"/>
@@ -108,25 +108,11 @@
       </a:defRPr>
     </a:lvl9pPr>
   </p:defaultTextStyle>
-  <p:extLst>
-    <p:ext uri="{EFAFB233-063F-42B5-8137-9DF3F51BA10A}">
-      <p15:sldGuideLst xmlns:p15="http://schemas.microsoft.com/office/powerpoint/2012/main"/>
-    </p:ext>
-  </p:extLst>
 </p:presentation>
 </file>
 
-<file path=ppt/revisionInfo.xml><?xml version="1.0" encoding="utf-8"?>
-<p1510:revInfo xmlns:a="http://schemas.openxmlformats.org/drawingml/2006/main" xmlns:r="http://schemas.openxmlformats.org/officeDocument/2006/relationships" xmlns:p1510="http://schemas.microsoft.com/office/powerpoint/2015/10/main">
-  <p1510:revLst>
-    <p1510:client id="{7DB165D8-8E8C-AD7A-7276-39B926C1C429}" v="631" dt="2026-03-17T11:12:34.565"/>
-    <p1510:client id="{FFCB24F0-03A5-C7D4-A8B4-7D6E3B12C928}" v="2" dt="2026-03-17T12:06:04.564"/>
-  </p1510:revLst>
-</p1510:revInfo>
-</file>
-
 <file path=ppt/slideLayouts/slideLayout1.xml><?xml version="1.0" encoding="utf-8"?>
-<p:sldLayout xmlns:a="http://schemas.openxmlformats.org/drawingml/2006/main" xmlns:r="http://schemas.openxmlformats.org/officeDocument/2006/relationships" xmlns:p="http://schemas.openxmlformats.org/presentationml/2006/main" showMasterSp="0" type="title" preserve="1">
+<p:sldLayout xmlns:a="http://schemas.openxmlformats.org/drawingml/2006/main" xmlns:r="http://schemas.openxmlformats.org/officeDocument/2006/relationships" xmlns:p="http://schemas.openxmlformats.org/presentationml/2006/main" type="title" preserve="1" showMasterSp="0">
   <p:cSld name="Title Slide">
     <p:spTree>
       <p:nvGrpSpPr>
@@ -304,6 +290,7 @@
               <a:rPr lang="en-US" dirty="0"/>
               <a:t>Click to edit Master title style</a:t>
             </a:r>
+            <a:endParaRPr lang="en-US" dirty="0"/>
           </a:p>
         </p:txBody>
       </p:sp>
@@ -423,6 +410,7 @@
               <a:rPr lang="en-US" dirty="0"/>
               <a:t>Click to edit Master subtitle style</a:t>
             </a:r>
+            <a:endParaRPr lang="en-US" dirty="0"/>
           </a:p>
         </p:txBody>
       </p:sp>
@@ -458,8 +446,6 @@
           <a:p>
             <a:fld id="{5923F103-BC34-4FE4-A40E-EDDEECFDA5D0}" type="datetimeFigureOut">
               <a:rPr lang="en-US" dirty="0"/>
-              <a:pPr/>
-              <a:t>3/18/2026</a:t>
             </a:fld>
             <a:endParaRPr lang="en-US" dirty="0"/>
           </a:p>
@@ -500,6 +486,7 @@
               <a:t>
               </a:t>
             </a:r>
+            <a:endParaRPr lang="en-US" dirty="0"/>
           </a:p>
         </p:txBody>
       </p:sp>
@@ -561,19 +548,12 @@
           <a:p>
             <a:fld id="{D57F1E4F-1CFF-5643-939E-217C01CDF565}" type="slidenum">
               <a:rPr lang="en-US" dirty="0"/>
-              <a:pPr/>
-              <a:t>‹#›</a:t>
             </a:fld>
             <a:endParaRPr lang="en-US" dirty="0"/>
           </a:p>
         </p:txBody>
       </p:sp>
     </p:spTree>
-    <p:extLst>
-      <p:ext uri="{BB962C8B-B14F-4D97-AF65-F5344CB8AC3E}">
-        <p14:creationId xmlns:p14="http://schemas.microsoft.com/office/powerpoint/2010/main" val="3536104410"/>
-      </p:ext>
-    </p:extLst>
   </p:cSld>
   <p:clrMapOvr>
     <a:masterClrMapping/>
@@ -1378,6 +1358,7 @@
               <a:rPr lang="en-US" dirty="0"/>
               <a:t>Click to edit Master title style</a:t>
             </a:r>
+            <a:endParaRPr lang="en-US" dirty="0"/>
           </a:p>
         </p:txBody>
       </p:sp>
@@ -1527,6 +1508,7 @@
               <a:rPr lang="en-US" dirty="0"/>
               <a:t>Click to edit Master text styles</a:t>
             </a:r>
+            <a:endParaRPr lang="en-US" dirty="0"/>
           </a:p>
         </p:txBody>
       </p:sp>
@@ -1547,7 +1529,6 @@
           <a:p>
             <a:fld id="{923A1CC3-2375-41D4-9E03-427CAF2A4C1A}" type="datetimeFigureOut">
               <a:rPr lang="en-US" dirty="0"/>
-              <a:t>3/18/2026</a:t>
             </a:fld>
             <a:endParaRPr lang="en-US" dirty="0"/>
           </a:p>
@@ -1573,6 +1554,7 @@
               <a:t>
               </a:t>
             </a:r>
+            <a:endParaRPr lang="en-US" dirty="0"/>
           </a:p>
         </p:txBody>
       </p:sp>
@@ -1629,19 +1611,12 @@
           <a:p>
             <a:fld id="{D57F1E4F-1CFF-5643-939E-217C01CDF565}" type="slidenum">
               <a:rPr lang="en-US" dirty="0"/>
-              <a:pPr/>
-              <a:t>‹#›</a:t>
             </a:fld>
             <a:endParaRPr lang="en-US" dirty="0"/>
           </a:p>
         </p:txBody>
       </p:sp>
     </p:spTree>
-    <p:extLst>
-      <p:ext uri="{BB962C8B-B14F-4D97-AF65-F5344CB8AC3E}">
-        <p14:creationId xmlns:p14="http://schemas.microsoft.com/office/powerpoint/2010/main" val="2427483898"/>
-      </p:ext>
-    </p:extLst>
   </p:cSld>
   <p:clrMapOvr>
     <a:masterClrMapping/>
@@ -1650,7 +1625,7 @@
 </file>
 
 <file path=ppt/slideLayouts/slideLayout11.xml><?xml version="1.0" encoding="utf-8"?>
-<p:sldLayout xmlns:a="http://schemas.openxmlformats.org/drawingml/2006/main" xmlns:r="http://schemas.openxmlformats.org/officeDocument/2006/relationships" xmlns:p="http://schemas.openxmlformats.org/presentationml/2006/main" showMasterSp="0" preserve="1">
+<p:sldLayout xmlns:a="http://schemas.openxmlformats.org/drawingml/2006/main" xmlns:r="http://schemas.openxmlformats.org/officeDocument/2006/relationships" xmlns:p="http://schemas.openxmlformats.org/presentationml/2006/main" preserve="1" showMasterSp="0">
   <p:cSld name="Title and Caption">
     <p:spTree>
       <p:nvGrpSpPr>
@@ -2444,6 +2419,7 @@
               <a:rPr lang="en-US" dirty="0"/>
               <a:t>Click to edit Master title style</a:t>
             </a:r>
+            <a:endParaRPr lang="en-US" dirty="0"/>
           </a:p>
         </p:txBody>
       </p:sp>
@@ -2511,6 +2487,7 @@
               <a:rPr lang="en-US" dirty="0"/>
               <a:t>Click to edit Master text styles</a:t>
             </a:r>
+            <a:endParaRPr lang="en-US" dirty="0"/>
           </a:p>
         </p:txBody>
       </p:sp>
@@ -2531,7 +2508,6 @@
           <a:p>
             <a:fld id="{AFF16868-8199-4C2C-A5B1-63AEE139F88E}" type="datetimeFigureOut">
               <a:rPr lang="en-US" dirty="0"/>
-              <a:t>3/18/2026</a:t>
             </a:fld>
             <a:endParaRPr lang="en-US" dirty="0"/>
           </a:p>
@@ -2557,6 +2533,7 @@
               <a:t>
               </a:t>
             </a:r>
+            <a:endParaRPr lang="en-US" dirty="0"/>
           </a:p>
         </p:txBody>
       </p:sp>
@@ -2613,19 +2590,12 @@
           <a:p>
             <a:fld id="{D57F1E4F-1CFF-5643-939E-217C01CDF565}" type="slidenum">
               <a:rPr lang="en-US" dirty="0"/>
-              <a:pPr/>
-              <a:t>‹#›</a:t>
             </a:fld>
             <a:endParaRPr lang="en-US" dirty="0"/>
           </a:p>
         </p:txBody>
       </p:sp>
     </p:spTree>
-    <p:extLst>
-      <p:ext uri="{BB962C8B-B14F-4D97-AF65-F5344CB8AC3E}">
-        <p14:creationId xmlns:p14="http://schemas.microsoft.com/office/powerpoint/2010/main" val="3650206839"/>
-      </p:ext>
-    </p:extLst>
   </p:cSld>
   <p:clrMapOvr>
     <a:masterClrMapping/>
@@ -2634,7 +2604,7 @@
 </file>
 
 <file path=ppt/slideLayouts/slideLayout12.xml><?xml version="1.0" encoding="utf-8"?>
-<p:sldLayout xmlns:a="http://schemas.openxmlformats.org/drawingml/2006/main" xmlns:r="http://schemas.openxmlformats.org/officeDocument/2006/relationships" xmlns:p="http://schemas.openxmlformats.org/presentationml/2006/main" showMasterSp="0" preserve="1">
+<p:sldLayout xmlns:a="http://schemas.openxmlformats.org/drawingml/2006/main" xmlns:r="http://schemas.openxmlformats.org/officeDocument/2006/relationships" xmlns:p="http://schemas.openxmlformats.org/presentationml/2006/main" preserve="1" showMasterSp="0">
   <p:cSld name="Quote with Caption">
     <p:spTree>
       <p:nvGrpSpPr>
@@ -3431,11 +3401,21 @@
                     <a:lumOff val="40000"/>
                   </a:schemeClr>
                 </a:solidFill>
-                <a:latin typeface="Arial"/>
-                <a:cs typeface="Arial"/>
+                <a:latin typeface="Arial" panose="020B0604020202020204"/>
+                <a:cs typeface="Arial" panose="020B0604020202020204"/>
               </a:rPr>
               <a:t>“</a:t>
             </a:r>
+            <a:endParaRPr lang="en-US" sz="9600" b="0" i="0" dirty="0">
+              <a:solidFill>
+                <a:schemeClr val="accent1">
+                  <a:lumMod val="60000"/>
+                  <a:lumOff val="40000"/>
+                </a:schemeClr>
+              </a:solidFill>
+              <a:latin typeface="Arial" panose="020B0604020202020204"/>
+              <a:cs typeface="Arial" panose="020B0604020202020204"/>
+            </a:endParaRPr>
           </a:p>
         </p:txBody>
       </p:sp>
@@ -3470,11 +3450,21 @@
                     <a:lumOff val="40000"/>
                   </a:schemeClr>
                 </a:solidFill>
-                <a:latin typeface="Arial"/>
-                <a:cs typeface="Arial"/>
+                <a:latin typeface="Arial" panose="020B0604020202020204"/>
+                <a:cs typeface="Arial" panose="020B0604020202020204"/>
               </a:rPr>
               <a:t>”</a:t>
             </a:r>
+            <a:endParaRPr lang="en-US" sz="9600" b="0" i="0" dirty="0">
+              <a:solidFill>
+                <a:schemeClr val="accent1">
+                  <a:lumMod val="60000"/>
+                  <a:lumOff val="40000"/>
+                </a:schemeClr>
+              </a:solidFill>
+              <a:latin typeface="Arial" panose="020B0604020202020204"/>
+              <a:cs typeface="Arial" panose="020B0604020202020204"/>
+            </a:endParaRPr>
           </a:p>
         </p:txBody>
       </p:sp>
@@ -3506,6 +3496,7 @@
               <a:rPr lang="en-US" dirty="0"/>
               <a:t>Click to edit Master title style</a:t>
             </a:r>
+            <a:endParaRPr lang="en-US" dirty="0"/>
           </a:p>
         </p:txBody>
       </p:sp>
@@ -3582,6 +3573,7 @@
               <a:rPr lang="en-US" dirty="0"/>
               <a:t>Click to edit Master text styles</a:t>
             </a:r>
+            <a:endParaRPr lang="en-US" dirty="0"/>
           </a:p>
         </p:txBody>
       </p:sp>
@@ -3649,6 +3641,7 @@
               <a:rPr lang="en-US" dirty="0"/>
               <a:t>Click to edit Master text styles</a:t>
             </a:r>
+            <a:endParaRPr lang="en-US" dirty="0"/>
           </a:p>
         </p:txBody>
       </p:sp>
@@ -3669,7 +3662,6 @@
           <a:p>
             <a:fld id="{AAD9FF7F-6988-44CC-821B-644E70CD2F73}" type="datetimeFigureOut">
               <a:rPr lang="en-US" dirty="0"/>
-              <a:t>3/18/2026</a:t>
             </a:fld>
             <a:endParaRPr lang="en-US" dirty="0"/>
           </a:p>
@@ -3695,6 +3687,7 @@
               <a:t>
               </a:t>
             </a:r>
+            <a:endParaRPr lang="en-US" dirty="0"/>
           </a:p>
         </p:txBody>
       </p:sp>
@@ -3751,19 +3744,12 @@
           <a:p>
             <a:fld id="{D57F1E4F-1CFF-5643-939E-217C01CDF565}" type="slidenum">
               <a:rPr lang="en-US" dirty="0"/>
-              <a:pPr/>
-              <a:t>‹#›</a:t>
             </a:fld>
             <a:endParaRPr lang="en-US" dirty="0"/>
           </a:p>
         </p:txBody>
       </p:sp>
     </p:spTree>
-    <p:extLst>
-      <p:ext uri="{BB962C8B-B14F-4D97-AF65-F5344CB8AC3E}">
-        <p14:creationId xmlns:p14="http://schemas.microsoft.com/office/powerpoint/2010/main" val="4000448535"/>
-      </p:ext>
-    </p:extLst>
   </p:cSld>
   <p:clrMapOvr>
     <a:masterClrMapping/>
@@ -3772,7 +3758,7 @@
 </file>
 
 <file path=ppt/slideLayouts/slideLayout13.xml><?xml version="1.0" encoding="utf-8"?>
-<p:sldLayout xmlns:a="http://schemas.openxmlformats.org/drawingml/2006/main" xmlns:r="http://schemas.openxmlformats.org/officeDocument/2006/relationships" xmlns:p="http://schemas.openxmlformats.org/presentationml/2006/main" showMasterSp="0" preserve="1">
+<p:sldLayout xmlns:a="http://schemas.openxmlformats.org/drawingml/2006/main" xmlns:r="http://schemas.openxmlformats.org/officeDocument/2006/relationships" xmlns:p="http://schemas.openxmlformats.org/presentationml/2006/main" preserve="1" showMasterSp="0">
   <p:cSld name="Name Card">
     <p:spTree>
       <p:nvGrpSpPr>
@@ -4566,6 +4552,7 @@
               <a:rPr lang="en-US" dirty="0"/>
               <a:t>Click to edit Master title style</a:t>
             </a:r>
+            <a:endParaRPr lang="en-US" dirty="0"/>
           </a:p>
         </p:txBody>
       </p:sp>
@@ -4686,6 +4673,7 @@
               <a:rPr lang="en-US" dirty="0"/>
               <a:t>Click to edit Master text styles</a:t>
             </a:r>
+            <a:endParaRPr lang="en-US" dirty="0"/>
           </a:p>
         </p:txBody>
       </p:sp>
@@ -4706,7 +4694,6 @@
           <a:p>
             <a:fld id="{5C12C299-16B2-4475-990D-751901EACC14}" type="datetimeFigureOut">
               <a:rPr lang="en-US" dirty="0"/>
-              <a:t>3/18/2026</a:t>
             </a:fld>
             <a:endParaRPr lang="en-US" dirty="0"/>
           </a:p>
@@ -4732,6 +4719,7 @@
               <a:t>
               </a:t>
             </a:r>
+            <a:endParaRPr lang="en-US" dirty="0"/>
           </a:p>
         </p:txBody>
       </p:sp>
@@ -4788,19 +4776,12 @@
           <a:p>
             <a:fld id="{D57F1E4F-1CFF-5643-939E-217C01CDF565}" type="slidenum">
               <a:rPr lang="en-US" dirty="0"/>
-              <a:pPr/>
-              <a:t>‹#›</a:t>
             </a:fld>
             <a:endParaRPr lang="en-US" dirty="0"/>
           </a:p>
         </p:txBody>
       </p:sp>
     </p:spTree>
-    <p:extLst>
-      <p:ext uri="{BB962C8B-B14F-4D97-AF65-F5344CB8AC3E}">
-        <p14:creationId xmlns:p14="http://schemas.microsoft.com/office/powerpoint/2010/main" val="224351225"/>
-      </p:ext>
-    </p:extLst>
   </p:cSld>
   <p:clrMapOvr>
     <a:masterClrMapping/>
@@ -4853,6 +4834,7 @@
               <a:rPr lang="en-US" dirty="0"/>
               <a:t>Click to edit Master title style</a:t>
             </a:r>
+            <a:endParaRPr lang="en-US" dirty="0"/>
           </a:p>
         </p:txBody>
       </p:sp>
@@ -4927,6 +4909,7 @@
               <a:rPr lang="en-US" dirty="0"/>
               <a:t>Click to edit Master text styles</a:t>
             </a:r>
+            <a:endParaRPr lang="en-US" dirty="0"/>
           </a:p>
         </p:txBody>
       </p:sp>
@@ -4994,6 +4977,7 @@
               <a:rPr lang="en-US" dirty="0"/>
               <a:t>Click to edit Master text styles</a:t>
             </a:r>
+            <a:endParaRPr lang="en-US" dirty="0"/>
           </a:p>
         </p:txBody>
       </p:sp>
@@ -5068,6 +5052,7 @@
               <a:rPr lang="en-US" dirty="0"/>
               <a:t>Click to edit Master text styles</a:t>
             </a:r>
+            <a:endParaRPr lang="en-US" dirty="0"/>
           </a:p>
         </p:txBody>
       </p:sp>
@@ -5135,6 +5120,7 @@
               <a:rPr lang="en-US" dirty="0"/>
               <a:t>Click to edit Master text styles</a:t>
             </a:r>
+            <a:endParaRPr lang="en-US" dirty="0"/>
           </a:p>
         </p:txBody>
       </p:sp>
@@ -5209,6 +5195,7 @@
               <a:rPr lang="en-US" dirty="0"/>
               <a:t>Click to edit Master text styles</a:t>
             </a:r>
+            <a:endParaRPr lang="en-US" dirty="0"/>
           </a:p>
         </p:txBody>
       </p:sp>
@@ -5276,6 +5263,7 @@
               <a:rPr lang="en-US" dirty="0"/>
               <a:t>Click to edit Master text styles</a:t>
             </a:r>
+            <a:endParaRPr lang="en-US" dirty="0"/>
           </a:p>
         </p:txBody>
       </p:sp>
@@ -5370,7 +5358,6 @@
           <a:p>
             <a:fld id="{9FE86839-B9D8-4651-8783-F325ECE74E65}" type="datetimeFigureOut">
               <a:rPr lang="en-US" dirty="0"/>
-              <a:t>3/18/2026</a:t>
             </a:fld>
             <a:endParaRPr lang="en-US" dirty="0"/>
           </a:p>
@@ -5396,6 +5383,7 @@
               <a:t>
               </a:t>
             </a:r>
+            <a:endParaRPr lang="en-US" dirty="0"/>
           </a:p>
         </p:txBody>
       </p:sp>
@@ -5416,19 +5404,12 @@
           <a:p>
             <a:fld id="{D57F1E4F-1CFF-5643-939E-217C01CDF565}" type="slidenum">
               <a:rPr lang="en-US" dirty="0"/>
-              <a:pPr/>
-              <a:t>‹#›</a:t>
             </a:fld>
             <a:endParaRPr lang="en-US" dirty="0"/>
           </a:p>
         </p:txBody>
       </p:sp>
     </p:spTree>
-    <p:extLst>
-      <p:ext uri="{BB962C8B-B14F-4D97-AF65-F5344CB8AC3E}">
-        <p14:creationId xmlns:p14="http://schemas.microsoft.com/office/powerpoint/2010/main" val="3121748875"/>
-      </p:ext>
-    </p:extLst>
   </p:cSld>
   <p:clrMapOvr>
     <a:masterClrMapping/>
@@ -5481,6 +5462,7 @@
               <a:rPr lang="en-US" dirty="0"/>
               <a:t>Click to edit Master title style</a:t>
             </a:r>
+            <a:endParaRPr lang="en-US" dirty="0"/>
           </a:p>
         </p:txBody>
       </p:sp>
@@ -5555,6 +5537,7 @@
               <a:rPr lang="en-US" dirty="0"/>
               <a:t>Click to edit Master text styles</a:t>
             </a:r>
+            <a:endParaRPr lang="en-US" dirty="0"/>
           </a:p>
         </p:txBody>
       </p:sp>
@@ -5697,6 +5680,7 @@
               <a:rPr lang="en-US" dirty="0"/>
               <a:t>Click to edit Master text styles</a:t>
             </a:r>
+            <a:endParaRPr lang="en-US" dirty="0"/>
           </a:p>
         </p:txBody>
       </p:sp>
@@ -5771,6 +5755,7 @@
               <a:rPr lang="en-US" dirty="0"/>
               <a:t>Click to edit Master text styles</a:t>
             </a:r>
+            <a:endParaRPr lang="en-US" dirty="0"/>
           </a:p>
         </p:txBody>
       </p:sp>
@@ -5913,6 +5898,7 @@
               <a:rPr lang="en-US" dirty="0"/>
               <a:t>Click to edit Master text styles</a:t>
             </a:r>
+            <a:endParaRPr lang="en-US" dirty="0"/>
           </a:p>
         </p:txBody>
       </p:sp>
@@ -5987,6 +5973,7 @@
               <a:rPr lang="en-US" dirty="0"/>
               <a:t>Click to edit Master text styles</a:t>
             </a:r>
+            <a:endParaRPr lang="en-US" dirty="0"/>
           </a:p>
         </p:txBody>
       </p:sp>
@@ -6129,6 +6116,7 @@
               <a:rPr lang="en-US" dirty="0"/>
               <a:t>Click to edit Master text styles</a:t>
             </a:r>
+            <a:endParaRPr lang="en-US" dirty="0"/>
           </a:p>
         </p:txBody>
       </p:sp>
@@ -6223,7 +6211,6 @@
           <a:p>
             <a:fld id="{FD484F64-32F6-45C5-931F-ADC1662401D0}" type="datetimeFigureOut">
               <a:rPr lang="en-US" dirty="0"/>
-              <a:t>3/18/2026</a:t>
             </a:fld>
             <a:endParaRPr lang="en-US" dirty="0"/>
           </a:p>
@@ -6254,6 +6241,7 @@
               <a:t>
               </a:t>
             </a:r>
+            <a:endParaRPr lang="en-US" dirty="0"/>
           </a:p>
         </p:txBody>
       </p:sp>
@@ -6274,19 +6262,12 @@
           <a:p>
             <a:fld id="{D57F1E4F-1CFF-5643-939E-217C01CDF565}" type="slidenum">
               <a:rPr lang="en-US" dirty="0"/>
-              <a:pPr/>
-              <a:t>‹#›</a:t>
             </a:fld>
             <a:endParaRPr lang="en-US" dirty="0"/>
           </a:p>
         </p:txBody>
       </p:sp>
     </p:spTree>
-    <p:extLst>
-      <p:ext uri="{BB962C8B-B14F-4D97-AF65-F5344CB8AC3E}">
-        <p14:creationId xmlns:p14="http://schemas.microsoft.com/office/powerpoint/2010/main" val="3548380000"/>
-      </p:ext>
-    </p:extLst>
   </p:cSld>
   <p:clrMapOvr>
     <a:masterClrMapping/>
@@ -6335,6 +6316,7 @@
               <a:rPr lang="en-US" dirty="0"/>
               <a:t>Click to edit Master title style</a:t>
             </a:r>
+            <a:endParaRPr lang="en-US" dirty="0"/>
           </a:p>
         </p:txBody>
       </p:sp>
@@ -6363,6 +6345,7 @@
               <a:rPr lang="en-US" dirty="0"/>
               <a:t>Click to edit Master text styles</a:t>
             </a:r>
+            <a:endParaRPr lang="en-US" dirty="0"/>
           </a:p>
           <a:p>
             <a:pPr lvl="1"/>
@@ -6370,6 +6353,7 @@
               <a:rPr lang="en-US" dirty="0"/>
               <a:t>Second level</a:t>
             </a:r>
+            <a:endParaRPr lang="en-US" dirty="0"/>
           </a:p>
           <a:p>
             <a:pPr lvl="2"/>
@@ -6377,6 +6361,7 @@
               <a:rPr lang="en-US" dirty="0"/>
               <a:t>Third level</a:t>
             </a:r>
+            <a:endParaRPr lang="en-US" dirty="0"/>
           </a:p>
           <a:p>
             <a:pPr lvl="3"/>
@@ -6384,6 +6369,7 @@
               <a:rPr lang="en-US" dirty="0"/>
               <a:t>Fourth level</a:t>
             </a:r>
+            <a:endParaRPr lang="en-US" dirty="0"/>
           </a:p>
           <a:p>
             <a:pPr lvl="4"/>
@@ -6391,6 +6377,7 @@
               <a:rPr lang="en-US" dirty="0"/>
               <a:t>Fifth level</a:t>
             </a:r>
+            <a:endParaRPr lang="en-US" dirty="0"/>
           </a:p>
         </p:txBody>
       </p:sp>
@@ -6416,7 +6403,6 @@
           <a:p>
             <a:fld id="{53086D93-FCAC-47E0-A2EE-787E62CA814C}" type="datetimeFigureOut">
               <a:rPr lang="en-US" dirty="0"/>
-              <a:t>3/18/2026</a:t>
             </a:fld>
             <a:endParaRPr lang="en-US" dirty="0"/>
           </a:p>
@@ -6442,6 +6428,7 @@
               <a:t>
               </a:t>
             </a:r>
+            <a:endParaRPr lang="en-US" dirty="0"/>
           </a:p>
         </p:txBody>
       </p:sp>
@@ -6462,19 +6449,12 @@
           <a:p>
             <a:fld id="{D57F1E4F-1CFF-5643-939E-217C01CDF565}" type="slidenum">
               <a:rPr lang="en-US" dirty="0"/>
-              <a:pPr/>
-              <a:t>‹#›</a:t>
             </a:fld>
             <a:endParaRPr lang="en-US" dirty="0"/>
           </a:p>
         </p:txBody>
       </p:sp>
     </p:spTree>
-    <p:extLst>
-      <p:ext uri="{BB962C8B-B14F-4D97-AF65-F5344CB8AC3E}">
-        <p14:creationId xmlns:p14="http://schemas.microsoft.com/office/powerpoint/2010/main" val="3224678741"/>
-      </p:ext>
-    </p:extLst>
   </p:cSld>
   <p:clrMapOvr>
     <a:masterClrMapping/>
@@ -6483,7 +6463,7 @@
 </file>
 
 <file path=ppt/slideLayouts/slideLayout17.xml><?xml version="1.0" encoding="utf-8"?>
-<p:sldLayout xmlns:a="http://schemas.openxmlformats.org/drawingml/2006/main" xmlns:r="http://schemas.openxmlformats.org/officeDocument/2006/relationships" xmlns:p="http://schemas.openxmlformats.org/presentationml/2006/main" showMasterSp="0" type="vertTitleAndTx" preserve="1">
+<p:sldLayout xmlns:a="http://schemas.openxmlformats.org/drawingml/2006/main" xmlns:r="http://schemas.openxmlformats.org/officeDocument/2006/relationships" xmlns:p="http://schemas.openxmlformats.org/presentationml/2006/main" type="vertTitleAndTx" preserve="1" showMasterSp="0">
   <p:cSld name="Vertical Title and Text">
     <p:spTree>
       <p:nvGrpSpPr>
@@ -7310,6 +7290,7 @@
               <a:rPr lang="en-US" dirty="0"/>
               <a:t>Click to edit Master title style</a:t>
             </a:r>
+            <a:endParaRPr lang="en-US" dirty="0"/>
           </a:p>
         </p:txBody>
       </p:sp>
@@ -7338,6 +7319,7 @@
               <a:rPr lang="en-US" dirty="0"/>
               <a:t>Click to edit Master text styles</a:t>
             </a:r>
+            <a:endParaRPr lang="en-US" dirty="0"/>
           </a:p>
           <a:p>
             <a:pPr lvl="1"/>
@@ -7345,6 +7327,7 @@
               <a:rPr lang="en-US" dirty="0"/>
               <a:t>Second level</a:t>
             </a:r>
+            <a:endParaRPr lang="en-US" dirty="0"/>
           </a:p>
           <a:p>
             <a:pPr lvl="2"/>
@@ -7352,6 +7335,7 @@
               <a:rPr lang="en-US" dirty="0"/>
               <a:t>Third level</a:t>
             </a:r>
+            <a:endParaRPr lang="en-US" dirty="0"/>
           </a:p>
           <a:p>
             <a:pPr lvl="3"/>
@@ -7359,6 +7343,7 @@
               <a:rPr lang="en-US" dirty="0"/>
               <a:t>Fourth level</a:t>
             </a:r>
+            <a:endParaRPr lang="en-US" dirty="0"/>
           </a:p>
           <a:p>
             <a:pPr lvl="4"/>
@@ -7366,6 +7351,7 @@
               <a:rPr lang="en-US" dirty="0"/>
               <a:t>Fifth level</a:t>
             </a:r>
+            <a:endParaRPr lang="en-US" dirty="0"/>
           </a:p>
         </p:txBody>
       </p:sp>
@@ -7391,7 +7377,6 @@
           <a:p>
             <a:fld id="{CDA879A6-0FD0-4734-A311-86BFCA472E6E}" type="datetimeFigureOut">
               <a:rPr lang="en-US" dirty="0"/>
-              <a:t>3/18/2026</a:t>
             </a:fld>
             <a:endParaRPr lang="en-US" dirty="0"/>
           </a:p>
@@ -7417,6 +7402,7 @@
               <a:t>
               </a:t>
             </a:r>
+            <a:endParaRPr lang="en-US" dirty="0"/>
           </a:p>
         </p:txBody>
       </p:sp>
@@ -7473,19 +7459,12 @@
           <a:p>
             <a:fld id="{D57F1E4F-1CFF-5643-939E-217C01CDF565}" type="slidenum">
               <a:rPr lang="en-US" dirty="0"/>
-              <a:pPr/>
-              <a:t>‹#›</a:t>
             </a:fld>
             <a:endParaRPr lang="en-US" dirty="0"/>
           </a:p>
         </p:txBody>
       </p:sp>
     </p:spTree>
-    <p:extLst>
-      <p:ext uri="{BB962C8B-B14F-4D97-AF65-F5344CB8AC3E}">
-        <p14:creationId xmlns:p14="http://schemas.microsoft.com/office/powerpoint/2010/main" val="3557803987"/>
-      </p:ext>
-    </p:extLst>
   </p:cSld>
   <p:clrMapOvr>
     <a:masterClrMapping/>
@@ -7529,6 +7508,7 @@
               <a:rPr lang="en-US" dirty="0"/>
               <a:t>Click to edit Master title style</a:t>
             </a:r>
+            <a:endParaRPr lang="en-US" dirty="0"/>
           </a:p>
         </p:txBody>
       </p:sp>
@@ -7557,6 +7537,7 @@
               <a:rPr lang="en-US" dirty="0"/>
               <a:t>Click to edit Master text styles</a:t>
             </a:r>
+            <a:endParaRPr lang="en-US" dirty="0"/>
           </a:p>
           <a:p>
             <a:pPr lvl="1"/>
@@ -7564,6 +7545,7 @@
               <a:rPr lang="en-US" dirty="0"/>
               <a:t>Second level</a:t>
             </a:r>
+            <a:endParaRPr lang="en-US" dirty="0"/>
           </a:p>
           <a:p>
             <a:pPr lvl="2"/>
@@ -7571,6 +7553,7 @@
               <a:rPr lang="en-US" dirty="0"/>
               <a:t>Third level</a:t>
             </a:r>
+            <a:endParaRPr lang="en-US" dirty="0"/>
           </a:p>
           <a:p>
             <a:pPr lvl="3"/>
@@ -7578,6 +7561,7 @@
               <a:rPr lang="en-US" dirty="0"/>
               <a:t>Fourth level</a:t>
             </a:r>
+            <a:endParaRPr lang="en-US" dirty="0"/>
           </a:p>
           <a:p>
             <a:pPr lvl="4"/>
@@ -7585,6 +7569,7 @@
               <a:rPr lang="en-US" dirty="0"/>
               <a:t>Fifth level</a:t>
             </a:r>
+            <a:endParaRPr lang="en-US" dirty="0"/>
           </a:p>
         </p:txBody>
       </p:sp>
@@ -7605,7 +7590,6 @@
           <a:p>
             <a:fld id="{19C9CA7B-DFD4-44B5-8C60-D14B8CD1FB59}" type="datetimeFigureOut">
               <a:rPr lang="en-US" dirty="0"/>
-              <a:t>3/18/2026</a:t>
             </a:fld>
             <a:endParaRPr lang="en-US" dirty="0"/>
           </a:p>
@@ -7631,6 +7615,7 @@
               <a:t>
               </a:t>
             </a:r>
+            <a:endParaRPr lang="en-US" dirty="0"/>
           </a:p>
         </p:txBody>
       </p:sp>
@@ -7651,19 +7636,12 @@
           <a:p>
             <a:fld id="{D57F1E4F-1CFF-5643-939E-217C01CDF565}" type="slidenum">
               <a:rPr lang="en-US" dirty="0"/>
-              <a:pPr/>
-              <a:t>‹#›</a:t>
             </a:fld>
             <a:endParaRPr lang="en-US" dirty="0"/>
           </a:p>
         </p:txBody>
       </p:sp>
     </p:spTree>
-    <p:extLst>
-      <p:ext uri="{BB962C8B-B14F-4D97-AF65-F5344CB8AC3E}">
-        <p14:creationId xmlns:p14="http://schemas.microsoft.com/office/powerpoint/2010/main" val="956302650"/>
-      </p:ext>
-    </p:extLst>
   </p:cSld>
   <p:clrMapOvr>
     <a:masterClrMapping/>
@@ -7672,7 +7650,7 @@
 </file>
 
 <file path=ppt/slideLayouts/slideLayout3.xml><?xml version="1.0" encoding="utf-8"?>
-<p:sldLayout xmlns:a="http://schemas.openxmlformats.org/drawingml/2006/main" xmlns:r="http://schemas.openxmlformats.org/officeDocument/2006/relationships" xmlns:p="http://schemas.openxmlformats.org/presentationml/2006/main" showMasterSp="0" type="secHead" preserve="1">
+<p:sldLayout xmlns:a="http://schemas.openxmlformats.org/drawingml/2006/main" xmlns:r="http://schemas.openxmlformats.org/officeDocument/2006/relationships" xmlns:p="http://schemas.openxmlformats.org/presentationml/2006/main" type="secHead" preserve="1" showMasterSp="0">
   <p:cSld name="Section Header">
     <p:spTree>
       <p:nvGrpSpPr>
@@ -8503,6 +8481,7 @@
               <a:rPr lang="en-US" dirty="0"/>
               <a:t>Click to edit Master title style</a:t>
             </a:r>
+            <a:endParaRPr lang="en-US" dirty="0"/>
           </a:p>
         </p:txBody>
       </p:sp>
@@ -8623,6 +8602,7 @@
               <a:rPr lang="en-US" dirty="0"/>
               <a:t>Click to edit Master text styles</a:t>
             </a:r>
+            <a:endParaRPr lang="en-US" dirty="0"/>
           </a:p>
         </p:txBody>
       </p:sp>
@@ -8643,7 +8623,6 @@
           <a:p>
             <a:fld id="{F34E6425-0181-43F2-84FC-787E803FD2F8}" type="datetimeFigureOut">
               <a:rPr lang="en-US" dirty="0"/>
-              <a:t>3/18/2026</a:t>
             </a:fld>
             <a:endParaRPr lang="en-US" dirty="0"/>
           </a:p>
@@ -8669,6 +8648,7 @@
               <a:t>
               </a:t>
             </a:r>
+            <a:endParaRPr lang="en-US" dirty="0"/>
           </a:p>
         </p:txBody>
       </p:sp>
@@ -8725,19 +8705,12 @@
           <a:p>
             <a:fld id="{D57F1E4F-1CFF-5643-939E-217C01CDF565}" type="slidenum">
               <a:rPr lang="en-US" dirty="0"/>
-              <a:pPr/>
-              <a:t>‹#›</a:t>
             </a:fld>
             <a:endParaRPr lang="en-US" dirty="0"/>
           </a:p>
         </p:txBody>
       </p:sp>
     </p:spTree>
-    <p:extLst>
-      <p:ext uri="{BB962C8B-B14F-4D97-AF65-F5344CB8AC3E}">
-        <p14:creationId xmlns:p14="http://schemas.microsoft.com/office/powerpoint/2010/main" val="1492558303"/>
-      </p:ext>
-    </p:extLst>
   </p:cSld>
   <p:clrMapOvr>
     <a:masterClrMapping/>
@@ -8781,6 +8754,7 @@
               <a:rPr lang="en-US" dirty="0"/>
               <a:t>Click to edit Master title style</a:t>
             </a:r>
+            <a:endParaRPr lang="en-US" dirty="0"/>
           </a:p>
         </p:txBody>
       </p:sp>
@@ -8811,6 +8785,7 @@
               <a:rPr lang="en-US" dirty="0"/>
               <a:t>Click to edit Master text styles</a:t>
             </a:r>
+            <a:endParaRPr lang="en-US" dirty="0"/>
           </a:p>
           <a:p>
             <a:pPr lvl="1"/>
@@ -8818,6 +8793,7 @@
               <a:rPr lang="en-US" dirty="0"/>
               <a:t>Second level</a:t>
             </a:r>
+            <a:endParaRPr lang="en-US" dirty="0"/>
           </a:p>
           <a:p>
             <a:pPr lvl="2"/>
@@ -8825,6 +8801,7 @@
               <a:rPr lang="en-US" dirty="0"/>
               <a:t>Third level</a:t>
             </a:r>
+            <a:endParaRPr lang="en-US" dirty="0"/>
           </a:p>
           <a:p>
             <a:pPr lvl="3"/>
@@ -8832,6 +8809,7 @@
               <a:rPr lang="en-US" dirty="0"/>
               <a:t>Fourth level</a:t>
             </a:r>
+            <a:endParaRPr lang="en-US" dirty="0"/>
           </a:p>
           <a:p>
             <a:pPr lvl="4"/>
@@ -8839,6 +8817,7 @@
               <a:rPr lang="en-US" dirty="0"/>
               <a:t>Fifth level</a:t>
             </a:r>
+            <a:endParaRPr lang="en-US" dirty="0"/>
           </a:p>
         </p:txBody>
       </p:sp>
@@ -8869,6 +8848,7 @@
               <a:rPr lang="en-US" dirty="0"/>
               <a:t>Click to edit Master text styles</a:t>
             </a:r>
+            <a:endParaRPr lang="en-US" dirty="0"/>
           </a:p>
           <a:p>
             <a:pPr lvl="1"/>
@@ -8876,6 +8856,7 @@
               <a:rPr lang="en-US" dirty="0"/>
               <a:t>Second level</a:t>
             </a:r>
+            <a:endParaRPr lang="en-US" dirty="0"/>
           </a:p>
           <a:p>
             <a:pPr lvl="2"/>
@@ -8883,6 +8864,7 @@
               <a:rPr lang="en-US" dirty="0"/>
               <a:t>Third level</a:t>
             </a:r>
+            <a:endParaRPr lang="en-US" dirty="0"/>
           </a:p>
           <a:p>
             <a:pPr lvl="3"/>
@@ -8890,6 +8872,7 @@
               <a:rPr lang="en-US" dirty="0"/>
               <a:t>Fourth level</a:t>
             </a:r>
+            <a:endParaRPr lang="en-US" dirty="0"/>
           </a:p>
           <a:p>
             <a:pPr lvl="4"/>
@@ -8897,6 +8880,7 @@
               <a:rPr lang="en-US" dirty="0"/>
               <a:t>Fifth level</a:t>
             </a:r>
+            <a:endParaRPr lang="en-US" dirty="0"/>
           </a:p>
         </p:txBody>
       </p:sp>
@@ -8917,7 +8901,6 @@
           <a:p>
             <a:fld id="{3BDB8791-F1B0-41E7-B7FD-A781E65C4266}" type="datetimeFigureOut">
               <a:rPr lang="en-US" dirty="0"/>
-              <a:t>3/18/2026</a:t>
             </a:fld>
             <a:endParaRPr lang="en-US" dirty="0"/>
           </a:p>
@@ -8943,6 +8926,7 @@
               <a:t>
               </a:t>
             </a:r>
+            <a:endParaRPr lang="en-US" dirty="0"/>
           </a:p>
         </p:txBody>
       </p:sp>
@@ -8963,19 +8947,12 @@
           <a:p>
             <a:fld id="{D57F1E4F-1CFF-5643-939E-217C01CDF565}" type="slidenum">
               <a:rPr lang="en-US" dirty="0"/>
-              <a:pPr/>
-              <a:t>‹#›</a:t>
             </a:fld>
             <a:endParaRPr lang="en-US" dirty="0"/>
           </a:p>
         </p:txBody>
       </p:sp>
     </p:spTree>
-    <p:extLst>
-      <p:ext uri="{BB962C8B-B14F-4D97-AF65-F5344CB8AC3E}">
-        <p14:creationId xmlns:p14="http://schemas.microsoft.com/office/powerpoint/2010/main" val="1647398651"/>
-      </p:ext>
-    </p:extLst>
   </p:cSld>
   <p:clrMapOvr>
     <a:masterClrMapping/>
@@ -9023,6 +9000,7 @@
               <a:rPr lang="en-US" dirty="0"/>
               <a:t>Click to edit Master title style</a:t>
             </a:r>
+            <a:endParaRPr lang="en-US" dirty="0"/>
           </a:p>
         </p:txBody>
       </p:sp>
@@ -9094,6 +9072,7 @@
               <a:rPr lang="en-US" dirty="0"/>
               <a:t>Click to edit Master text styles</a:t>
             </a:r>
+            <a:endParaRPr lang="en-US" dirty="0"/>
           </a:p>
         </p:txBody>
       </p:sp>
@@ -9124,6 +9103,7 @@
               <a:rPr lang="en-US" dirty="0"/>
               <a:t>Click to edit Master text styles</a:t>
             </a:r>
+            <a:endParaRPr lang="en-US" dirty="0"/>
           </a:p>
           <a:p>
             <a:pPr lvl="1"/>
@@ -9131,6 +9111,7 @@
               <a:rPr lang="en-US" dirty="0"/>
               <a:t>Second level</a:t>
             </a:r>
+            <a:endParaRPr lang="en-US" dirty="0"/>
           </a:p>
           <a:p>
             <a:pPr lvl="2"/>
@@ -9138,6 +9119,7 @@
               <a:rPr lang="en-US" dirty="0"/>
               <a:t>Third level</a:t>
             </a:r>
+            <a:endParaRPr lang="en-US" dirty="0"/>
           </a:p>
           <a:p>
             <a:pPr lvl="3"/>
@@ -9145,6 +9127,7 @@
               <a:rPr lang="en-US" dirty="0"/>
               <a:t>Fourth level</a:t>
             </a:r>
+            <a:endParaRPr lang="en-US" dirty="0"/>
           </a:p>
           <a:p>
             <a:pPr lvl="4"/>
@@ -9152,6 +9135,7 @@
               <a:rPr lang="en-US" dirty="0"/>
               <a:t>Fifth level</a:t>
             </a:r>
+            <a:endParaRPr lang="en-US" dirty="0"/>
           </a:p>
         </p:txBody>
       </p:sp>
@@ -9223,6 +9207,7 @@
               <a:rPr lang="en-US" dirty="0"/>
               <a:t>Click to edit Master text styles</a:t>
             </a:r>
+            <a:endParaRPr lang="en-US" dirty="0"/>
           </a:p>
         </p:txBody>
       </p:sp>
@@ -9281,6 +9266,7 @@
               <a:rPr lang="en-US" dirty="0"/>
               <a:t>Click to edit Master text styles</a:t>
             </a:r>
+            <a:endParaRPr lang="en-US" dirty="0"/>
           </a:p>
           <a:p>
             <a:pPr lvl="1"/>
@@ -9288,6 +9274,7 @@
               <a:rPr lang="en-US" dirty="0"/>
               <a:t>Second level</a:t>
             </a:r>
+            <a:endParaRPr lang="en-US" dirty="0"/>
           </a:p>
           <a:p>
             <a:pPr lvl="2"/>
@@ -9295,6 +9282,7 @@
               <a:rPr lang="en-US" dirty="0"/>
               <a:t>Third level</a:t>
             </a:r>
+            <a:endParaRPr lang="en-US" dirty="0"/>
           </a:p>
           <a:p>
             <a:pPr lvl="3"/>
@@ -9302,6 +9290,7 @@
               <a:rPr lang="en-US" dirty="0"/>
               <a:t>Fourth level</a:t>
             </a:r>
+            <a:endParaRPr lang="en-US" dirty="0"/>
           </a:p>
           <a:p>
             <a:pPr lvl="4"/>
@@ -9309,6 +9298,7 @@
               <a:rPr lang="en-US" dirty="0"/>
               <a:t>Fifth level</a:t>
             </a:r>
+            <a:endParaRPr lang="en-US" dirty="0"/>
           </a:p>
         </p:txBody>
       </p:sp>
@@ -9329,7 +9319,6 @@
           <a:p>
             <a:fld id="{5FDD63B2-E120-4ED8-B27B-C685F510A5FE}" type="datetimeFigureOut">
               <a:rPr lang="en-US" dirty="0"/>
-              <a:t>3/18/2026</a:t>
             </a:fld>
             <a:endParaRPr lang="en-US" dirty="0"/>
           </a:p>
@@ -9355,6 +9344,7 @@
               <a:t>
               </a:t>
             </a:r>
+            <a:endParaRPr lang="en-US" dirty="0"/>
           </a:p>
         </p:txBody>
       </p:sp>
@@ -9375,19 +9365,12 @@
           <a:p>
             <a:fld id="{D57F1E4F-1CFF-5643-939E-217C01CDF565}" type="slidenum">
               <a:rPr lang="en-US" dirty="0"/>
-              <a:pPr/>
-              <a:t>‹#›</a:t>
             </a:fld>
             <a:endParaRPr lang="en-US" dirty="0"/>
           </a:p>
         </p:txBody>
       </p:sp>
     </p:spTree>
-    <p:extLst>
-      <p:ext uri="{BB962C8B-B14F-4D97-AF65-F5344CB8AC3E}">
-        <p14:creationId xmlns:p14="http://schemas.microsoft.com/office/powerpoint/2010/main" val="3753534225"/>
-      </p:ext>
-    </p:extLst>
   </p:cSld>
   <p:clrMapOvr>
     <a:masterClrMapping/>
@@ -9440,6 +9423,7 @@
               <a:rPr lang="en-US" dirty="0"/>
               <a:t>Click to edit Master title style</a:t>
             </a:r>
+            <a:endParaRPr lang="en-US" dirty="0"/>
           </a:p>
         </p:txBody>
       </p:sp>
@@ -9460,7 +9444,6 @@
           <a:p>
             <a:fld id="{7AA18ACC-A947-437B-A130-35BD54FDF1E9}" type="datetimeFigureOut">
               <a:rPr lang="en-US" dirty="0"/>
-              <a:t>3/18/2026</a:t>
             </a:fld>
             <a:endParaRPr lang="en-US" dirty="0"/>
           </a:p>
@@ -9486,6 +9469,7 @@
               <a:t>
               </a:t>
             </a:r>
+            <a:endParaRPr lang="en-US" dirty="0"/>
           </a:p>
         </p:txBody>
       </p:sp>
@@ -9506,19 +9490,12 @@
           <a:p>
             <a:fld id="{D57F1E4F-1CFF-5643-939E-217C01CDF565}" type="slidenum">
               <a:rPr lang="en-US" dirty="0"/>
-              <a:pPr/>
-              <a:t>‹#›</a:t>
             </a:fld>
             <a:endParaRPr lang="en-US" dirty="0"/>
           </a:p>
         </p:txBody>
       </p:sp>
     </p:spTree>
-    <p:extLst>
-      <p:ext uri="{BB962C8B-B14F-4D97-AF65-F5344CB8AC3E}">
-        <p14:creationId xmlns:p14="http://schemas.microsoft.com/office/powerpoint/2010/main" val="1054618711"/>
-      </p:ext>
-    </p:extLst>
   </p:cSld>
   <p:clrMapOvr>
     <a:masterClrMapping/>
@@ -9527,7 +9504,7 @@
 </file>
 
 <file path=ppt/slideLayouts/slideLayout7.xml><?xml version="1.0" encoding="utf-8"?>
-<p:sldLayout xmlns:a="http://schemas.openxmlformats.org/drawingml/2006/main" xmlns:r="http://schemas.openxmlformats.org/officeDocument/2006/relationships" xmlns:p="http://schemas.openxmlformats.org/presentationml/2006/main" showMasterSp="0" type="blank" preserve="1">
+<p:sldLayout xmlns:a="http://schemas.openxmlformats.org/drawingml/2006/main" xmlns:r="http://schemas.openxmlformats.org/officeDocument/2006/relationships" xmlns:p="http://schemas.openxmlformats.org/presentationml/2006/main" type="blank" preserve="1" showMasterSp="0">
   <p:cSld name="Blank">
     <p:spTree>
       <p:nvGrpSpPr>
@@ -9560,7 +9537,6 @@
           <a:p>
             <a:fld id="{7C8D7E02-BCB8-4D50-A234-369438C08659}" type="datetimeFigureOut">
               <a:rPr lang="en-US" dirty="0"/>
-              <a:t>3/18/2026</a:t>
             </a:fld>
             <a:endParaRPr lang="en-US" dirty="0"/>
           </a:p>
@@ -9586,6 +9562,7 @@
               <a:t>
               </a:t>
             </a:r>
+            <a:endParaRPr lang="en-US" dirty="0"/>
           </a:p>
         </p:txBody>
       </p:sp>
@@ -9642,19 +9619,12 @@
           <a:p>
             <a:fld id="{D57F1E4F-1CFF-5643-939E-217C01CDF565}" type="slidenum">
               <a:rPr lang="en-US" dirty="0"/>
-              <a:pPr/>
-              <a:t>‹#›</a:t>
             </a:fld>
             <a:endParaRPr lang="en-US" dirty="0"/>
           </a:p>
         </p:txBody>
       </p:sp>
     </p:spTree>
-    <p:extLst>
-      <p:ext uri="{BB962C8B-B14F-4D97-AF65-F5344CB8AC3E}">
-        <p14:creationId xmlns:p14="http://schemas.microsoft.com/office/powerpoint/2010/main" val="4222216755"/>
-      </p:ext>
-    </p:extLst>
   </p:cSld>
   <p:clrMapOvr>
     <a:masterClrMapping/>
@@ -9663,7 +9633,7 @@
 </file>
 
 <file path=ppt/slideLayouts/slideLayout8.xml><?xml version="1.0" encoding="utf-8"?>
-<p:sldLayout xmlns:a="http://schemas.openxmlformats.org/drawingml/2006/main" xmlns:r="http://schemas.openxmlformats.org/officeDocument/2006/relationships" xmlns:p="http://schemas.openxmlformats.org/presentationml/2006/main" showMasterSp="0" type="objTx" preserve="1">
+<p:sldLayout xmlns:a="http://schemas.openxmlformats.org/drawingml/2006/main" xmlns:r="http://schemas.openxmlformats.org/officeDocument/2006/relationships" xmlns:p="http://schemas.openxmlformats.org/presentationml/2006/main" type="objTx" preserve="1" showMasterSp="0">
   <p:cSld name="Content with Caption">
     <p:spTree>
       <p:nvGrpSpPr>
@@ -10494,6 +10464,7 @@
               <a:rPr lang="en-US" dirty="0"/>
               <a:t>Click to edit Master title style</a:t>
             </a:r>
+            <a:endParaRPr lang="en-US" dirty="0"/>
           </a:p>
         </p:txBody>
       </p:sp>
@@ -10524,6 +10495,7 @@
               <a:rPr lang="en-US" dirty="0"/>
               <a:t>Click to edit Master text styles</a:t>
             </a:r>
+            <a:endParaRPr lang="en-US" dirty="0"/>
           </a:p>
           <a:p>
             <a:pPr lvl="1"/>
@@ -10531,6 +10503,7 @@
               <a:rPr lang="en-US" dirty="0"/>
               <a:t>Second level</a:t>
             </a:r>
+            <a:endParaRPr lang="en-US" dirty="0"/>
           </a:p>
           <a:p>
             <a:pPr lvl="2"/>
@@ -10538,6 +10511,7 @@
               <a:rPr lang="en-US" dirty="0"/>
               <a:t>Third level</a:t>
             </a:r>
+            <a:endParaRPr lang="en-US" dirty="0"/>
           </a:p>
           <a:p>
             <a:pPr lvl="3"/>
@@ -10545,6 +10519,7 @@
               <a:rPr lang="en-US" dirty="0"/>
               <a:t>Fourth level</a:t>
             </a:r>
+            <a:endParaRPr lang="en-US" dirty="0"/>
           </a:p>
           <a:p>
             <a:pPr lvl="4"/>
@@ -10552,6 +10527,7 @@
               <a:rPr lang="en-US" dirty="0"/>
               <a:t>Fifth level</a:t>
             </a:r>
+            <a:endParaRPr lang="en-US" dirty="0"/>
           </a:p>
         </p:txBody>
       </p:sp>
@@ -10624,6 +10600,7 @@
               <a:rPr lang="en-US" dirty="0"/>
               <a:t>Click to edit Master text styles</a:t>
             </a:r>
+            <a:endParaRPr lang="en-US" dirty="0"/>
           </a:p>
         </p:txBody>
       </p:sp>
@@ -10644,7 +10621,6 @@
           <a:p>
             <a:fld id="{76E86A4C-8E40-4F87-A4F0-01A0687C5742}" type="datetimeFigureOut">
               <a:rPr lang="en-US" dirty="0"/>
-              <a:t>3/18/2026</a:t>
             </a:fld>
             <a:endParaRPr lang="en-US" dirty="0"/>
           </a:p>
@@ -10670,6 +10646,7 @@
               <a:t>
               </a:t>
             </a:r>
+            <a:endParaRPr lang="en-US" dirty="0"/>
           </a:p>
         </p:txBody>
       </p:sp>
@@ -10726,19 +10703,12 @@
           <a:p>
             <a:fld id="{D57F1E4F-1CFF-5643-939E-217C01CDF565}" type="slidenum">
               <a:rPr lang="en-US" dirty="0"/>
-              <a:pPr/>
-              <a:t>‹#›</a:t>
             </a:fld>
             <a:endParaRPr lang="en-US" dirty="0"/>
           </a:p>
         </p:txBody>
       </p:sp>
     </p:spTree>
-    <p:extLst>
-      <p:ext uri="{BB962C8B-B14F-4D97-AF65-F5344CB8AC3E}">
-        <p14:creationId xmlns:p14="http://schemas.microsoft.com/office/powerpoint/2010/main" val="1423695725"/>
-      </p:ext>
-    </p:extLst>
   </p:cSld>
   <p:clrMapOvr>
     <a:masterClrMapping/>
@@ -10747,7 +10717,7 @@
 </file>
 
 <file path=ppt/slideLayouts/slideLayout9.xml><?xml version="1.0" encoding="utf-8"?>
-<p:sldLayout xmlns:a="http://schemas.openxmlformats.org/drawingml/2006/main" xmlns:r="http://schemas.openxmlformats.org/officeDocument/2006/relationships" xmlns:p="http://schemas.openxmlformats.org/presentationml/2006/main" showMasterSp="0" type="picTx" preserve="1">
+<p:sldLayout xmlns:a="http://schemas.openxmlformats.org/drawingml/2006/main" xmlns:r="http://schemas.openxmlformats.org/officeDocument/2006/relationships" xmlns:p="http://schemas.openxmlformats.org/presentationml/2006/main" type="picTx" preserve="1" showMasterSp="0">
   <p:cSld name="Picture with Caption">
     <p:spTree>
       <p:nvGrpSpPr>
@@ -11580,6 +11550,7 @@
               <a:rPr lang="en-US" dirty="0"/>
               <a:t>Click to edit Master title style</a:t>
             </a:r>
+            <a:endParaRPr lang="en-US" dirty="0"/>
           </a:p>
         </p:txBody>
       </p:sp>
@@ -11732,6 +11703,7 @@
               <a:rPr lang="en-US" dirty="0"/>
               <a:t>Click to edit Master text styles</a:t>
             </a:r>
+            <a:endParaRPr lang="en-US" dirty="0"/>
           </a:p>
         </p:txBody>
       </p:sp>
@@ -11752,7 +11724,6 @@
           <a:p>
             <a:fld id="{35E72C73-2D91-4E12-BA25-F0AA0C03599B}" type="datetimeFigureOut">
               <a:rPr lang="en-US" dirty="0"/>
-              <a:t>3/18/2026</a:t>
             </a:fld>
             <a:endParaRPr lang="en-US" dirty="0"/>
           </a:p>
@@ -11778,6 +11749,7 @@
               <a:t>
               </a:t>
             </a:r>
+            <a:endParaRPr lang="en-US" dirty="0"/>
           </a:p>
         </p:txBody>
       </p:sp>
@@ -11834,19 +11806,12 @@
           <a:p>
             <a:fld id="{D57F1E4F-1CFF-5643-939E-217C01CDF565}" type="slidenum">
               <a:rPr lang="en-US" dirty="0"/>
-              <a:pPr/>
-              <a:t>‹#›</a:t>
             </a:fld>
             <a:endParaRPr lang="en-US" dirty="0"/>
           </a:p>
         </p:txBody>
       </p:sp>
     </p:spTree>
-    <p:extLst>
-      <p:ext uri="{BB962C8B-B14F-4D97-AF65-F5344CB8AC3E}">
-        <p14:creationId xmlns:p14="http://schemas.microsoft.com/office/powerpoint/2010/main" val="4141016782"/>
-      </p:ext>
-    </p:extLst>
   </p:cSld>
   <p:clrMapOvr>
     <a:masterClrMapping/>
@@ -11905,7 +11870,7 @@
               <a:avLst/>
             </a:prstGeom>
             <a:blipFill>
-              <a:blip r:embed="rId19">
+              <a:blip r:embed="rId18">
                 <a:duotone>
                   <a:schemeClr val="dk2">
                     <a:shade val="69000"/>
@@ -12655,6 +12620,7 @@
               <a:rPr lang="en-US" dirty="0"/>
               <a:t>Click to edit Master title style</a:t>
             </a:r>
+            <a:endParaRPr lang="en-US" dirty="0"/>
           </a:p>
         </p:txBody>
       </p:sp>
@@ -12688,6 +12654,7 @@
               <a:rPr lang="en-US" dirty="0"/>
               <a:t>Click to edit Master text styles</a:t>
             </a:r>
+            <a:endParaRPr lang="en-US" dirty="0"/>
           </a:p>
           <a:p>
             <a:pPr lvl="1"/>
@@ -12695,6 +12662,7 @@
               <a:rPr lang="en-US" dirty="0"/>
               <a:t>Second level</a:t>
             </a:r>
+            <a:endParaRPr lang="en-US" dirty="0"/>
           </a:p>
           <a:p>
             <a:pPr lvl="2"/>
@@ -12702,6 +12670,7 @@
               <a:rPr lang="en-US" dirty="0"/>
               <a:t>Third level</a:t>
             </a:r>
+            <a:endParaRPr lang="en-US" dirty="0"/>
           </a:p>
           <a:p>
             <a:pPr lvl="3"/>
@@ -12709,6 +12678,7 @@
               <a:rPr lang="en-US" dirty="0"/>
               <a:t>Fourth level</a:t>
             </a:r>
+            <a:endParaRPr lang="en-US" dirty="0"/>
           </a:p>
           <a:p>
             <a:pPr lvl="4"/>
@@ -12716,6 +12686,7 @@
               <a:rPr lang="en-US" dirty="0"/>
               <a:t>Fifth level</a:t>
             </a:r>
+            <a:endParaRPr lang="en-US" dirty="0"/>
           </a:p>
         </p:txBody>
       </p:sp>
@@ -12752,7 +12723,6 @@
           <a:p>
             <a:fld id="{2BE451C3-0FF4-47C4-B829-773ADF60F88C}" type="datetimeFigureOut">
               <a:rPr lang="en-US" dirty="0"/>
-              <a:t>3/18/2026</a:t>
             </a:fld>
             <a:endParaRPr lang="en-US" dirty="0"/>
           </a:p>
@@ -12794,6 +12764,7 @@
               <a:t>
               </a:t>
             </a:r>
+            <a:endParaRPr lang="en-US" dirty="0"/>
           </a:p>
         </p:txBody>
       </p:sp>
@@ -12866,39 +12837,32 @@
           <a:p>
             <a:fld id="{D57F1E4F-1CFF-5643-939E-217C01CDF565}" type="slidenum">
               <a:rPr lang="en-US" dirty="0"/>
-              <a:pPr/>
-              <a:t>‹#›</a:t>
             </a:fld>
             <a:endParaRPr lang="en-US" dirty="0"/>
           </a:p>
         </p:txBody>
       </p:sp>
     </p:spTree>
-    <p:extLst>
-      <p:ext uri="{BB962C8B-B14F-4D97-AF65-F5344CB8AC3E}">
-        <p14:creationId xmlns:p14="http://schemas.microsoft.com/office/powerpoint/2010/main" val="1262306653"/>
-      </p:ext>
-    </p:extLst>
   </p:cSld>
   <p:clrMap bg1="lt1" tx1="dk1" bg2="lt2" tx2="dk2" accent1="accent1" accent2="accent2" accent3="accent3" accent4="accent4" accent5="accent5" accent6="accent6" hlink="hlink" folHlink="folHlink"/>
   <p:sldLayoutIdLst>
-    <p:sldLayoutId id="2147483703" r:id="rId1"/>
-    <p:sldLayoutId id="2147483704" r:id="rId2"/>
-    <p:sldLayoutId id="2147483705" r:id="rId3"/>
-    <p:sldLayoutId id="2147483706" r:id="rId4"/>
-    <p:sldLayoutId id="2147483707" r:id="rId5"/>
-    <p:sldLayoutId id="2147483708" r:id="rId6"/>
-    <p:sldLayoutId id="2147483709" r:id="rId7"/>
-    <p:sldLayoutId id="2147483710" r:id="rId8"/>
-    <p:sldLayoutId id="2147483711" r:id="rId9"/>
-    <p:sldLayoutId id="2147483712" r:id="rId10"/>
-    <p:sldLayoutId id="2147483713" r:id="rId11"/>
-    <p:sldLayoutId id="2147483714" r:id="rId12"/>
-    <p:sldLayoutId id="2147483715" r:id="rId13"/>
-    <p:sldLayoutId id="2147483716" r:id="rId14"/>
-    <p:sldLayoutId id="2147483717" r:id="rId15"/>
-    <p:sldLayoutId id="2147483718" r:id="rId16"/>
-    <p:sldLayoutId id="2147483719" r:id="rId17"/>
+    <p:sldLayoutId id="2147483649" r:id="rId1"/>
+    <p:sldLayoutId id="2147483650" r:id="rId2"/>
+    <p:sldLayoutId id="2147483651" r:id="rId3"/>
+    <p:sldLayoutId id="2147483652" r:id="rId4"/>
+    <p:sldLayoutId id="2147483653" r:id="rId5"/>
+    <p:sldLayoutId id="2147483654" r:id="rId6"/>
+    <p:sldLayoutId id="2147483655" r:id="rId7"/>
+    <p:sldLayoutId id="2147483656" r:id="rId8"/>
+    <p:sldLayoutId id="2147483657" r:id="rId9"/>
+    <p:sldLayoutId id="2147483658" r:id="rId10"/>
+    <p:sldLayoutId id="2147483659" r:id="rId11"/>
+    <p:sldLayoutId id="2147483660" r:id="rId12"/>
+    <p:sldLayoutId id="2147483661" r:id="rId13"/>
+    <p:sldLayoutId id="2147483662" r:id="rId14"/>
+    <p:sldLayoutId id="2147483663" r:id="rId15"/>
+    <p:sldLayoutId id="2147483664" r:id="rId16"/>
+    <p:sldLayoutId id="2147483665" r:id="rId17"/>
   </p:sldLayoutIdLst>
   <p:hf sldNum="0" hdr="0" ftr="0" dt="0"/>
   <p:txStyles>
@@ -13340,15 +13304,15 @@
               </a:rPr>
               <a:t>VERSION CONTROL</a:t>
             </a:r>
+            <a:endParaRPr lang="en-US" b="1">
+              <a:solidFill>
+                <a:schemeClr val="bg1"/>
+              </a:solidFill>
+            </a:endParaRPr>
           </a:p>
         </p:txBody>
       </p:sp>
     </p:spTree>
-    <p:extLst>
-      <p:ext uri="{BB962C8B-B14F-4D97-AF65-F5344CB8AC3E}">
-        <p14:creationId xmlns:p14="http://schemas.microsoft.com/office/powerpoint/2010/main" val="109857222"/>
-      </p:ext>
-    </p:extLst>
   </p:cSld>
   <p:clrMapOvr>
     <a:masterClrMapping/>
@@ -13375,13 +13339,7 @@
       </p:grpSpPr>
       <p:sp>
         <p:nvSpPr>
-          <p:cNvPr id="2" name="Title 1">
-            <a:extLst>
-              <a:ext uri="{FF2B5EF4-FFF2-40B4-BE49-F238E27FC236}">
-                <a16:creationId xmlns:a16="http://schemas.microsoft.com/office/drawing/2014/main" id="{9999E297-D409-8A30-DF71-0CAFEF42182E}"/>
-              </a:ext>
-            </a:extLst>
-          </p:cNvPr>
+          <p:cNvPr id="2" name="Title 1"/>
           <p:cNvSpPr>
             <a:spLocks noGrp="1"/>
           </p:cNvSpPr>
@@ -13398,18 +13356,13 @@
               <a:rPr lang="en-US" b="1"/>
               <a:t>Introduction to Version Control</a:t>
             </a:r>
+            <a:endParaRPr lang="en-US" b="1"/>
           </a:p>
         </p:txBody>
       </p:sp>
       <p:sp>
         <p:nvSpPr>
-          <p:cNvPr id="3" name="Content Placeholder 2">
-            <a:extLst>
-              <a:ext uri="{FF2B5EF4-FFF2-40B4-BE49-F238E27FC236}">
-                <a16:creationId xmlns:a16="http://schemas.microsoft.com/office/drawing/2014/main" id="{24C26B82-86B6-CB39-F817-88B2A3233831}"/>
-              </a:ext>
-            </a:extLst>
-          </p:cNvPr>
+          <p:cNvPr id="3" name="Content Placeholder 2"/>
           <p:cNvSpPr>
             <a:spLocks noGrp="1"/>
           </p:cNvSpPr>
@@ -13438,6 +13391,7 @@
               <a:rPr lang="en-US"/>
               <a:t>Control –Revision Control-Source Control</a:t>
             </a:r>
+            <a:endParaRPr lang="en-US"/>
           </a:p>
           <a:p>
             <a:pPr algn="just"/>
@@ -13449,6 +13403,7 @@
               <a:rPr lang="en-US"/>
               <a:t>software utility that tracks and manages changes to a filesystem</a:t>
             </a:r>
+            <a:endParaRPr lang="en-US"/>
           </a:p>
           <a:p>
             <a:pPr algn="just"/>
@@ -13456,6 +13411,7 @@
               <a:rPr lang="en-US" dirty="0"/>
               <a:t>Keeps track of addition, deletion and modifications.</a:t>
             </a:r>
+            <a:endParaRPr lang="en-US" dirty="0"/>
           </a:p>
           <a:p>
             <a:pPr algn="just"/>
@@ -13463,6 +13419,7 @@
               <a:rPr lang="en-US"/>
               <a:t>Repository-Database which stores all the changes.</a:t>
             </a:r>
+            <a:endParaRPr lang="en-US"/>
           </a:p>
           <a:p>
             <a:pPr marL="0" indent="0" algn="just">
@@ -13473,11 +13430,6 @@
         </p:txBody>
       </p:sp>
     </p:spTree>
-    <p:extLst>
-      <p:ext uri="{BB962C8B-B14F-4D97-AF65-F5344CB8AC3E}">
-        <p14:creationId xmlns:p14="http://schemas.microsoft.com/office/powerpoint/2010/main" val="2945283161"/>
-      </p:ext>
-    </p:extLst>
   </p:cSld>
   <p:clrMapOvr>
     <a:masterClrMapping/>
@@ -13504,13 +13456,7 @@
       </p:grpSpPr>
       <p:sp>
         <p:nvSpPr>
-          <p:cNvPr id="2" name="Title 1">
-            <a:extLst>
-              <a:ext uri="{FF2B5EF4-FFF2-40B4-BE49-F238E27FC236}">
-                <a16:creationId xmlns:a16="http://schemas.microsoft.com/office/drawing/2014/main" id="{D5B7DFAA-E99B-290F-3FFC-09E3BFA05E82}"/>
-              </a:ext>
-            </a:extLst>
-          </p:cNvPr>
+          <p:cNvPr id="2" name="Title 1"/>
           <p:cNvSpPr>
             <a:spLocks noGrp="1"/>
           </p:cNvSpPr>
@@ -13541,13 +13487,7 @@
       </p:sp>
       <p:sp>
         <p:nvSpPr>
-          <p:cNvPr id="3" name="Content Placeholder 2">
-            <a:extLst>
-              <a:ext uri="{FF2B5EF4-FFF2-40B4-BE49-F238E27FC236}">
-                <a16:creationId xmlns:a16="http://schemas.microsoft.com/office/drawing/2014/main" id="{50A14D40-17FE-90D3-FF76-7C5FE462EBD5}"/>
-              </a:ext>
-            </a:extLst>
-          </p:cNvPr>
+          <p:cNvPr id="3" name="Content Placeholder 2"/>
           <p:cNvSpPr>
             <a:spLocks noGrp="1"/>
           </p:cNvSpPr>
@@ -13577,19 +13517,8 @@
           </a:p>
           <a:p>
             <a:r>
-              <a:rPr lang="en-US" dirty="0"/>
-              <a:t>Centralized-Central repo shared with all developers.</a:t>
-            </a:r>
-            <a:br>
-              <a:rPr lang="en-US" dirty="0"/>
-            </a:br>
-            <a:r>
-              <a:rPr lang="en-US" dirty="0"/>
-              <a:t>                        -Developers direc</a:t>
-            </a:r>
-            <a:r>
               <a:rPr lang="en-US"/>
-              <a:t>tly commit to the repo.</a:t>
+              <a:t>ssssss repo.</a:t>
             </a:r>
             <a:endParaRPr lang="en-US" dirty="0"/>
           </a:p>
@@ -13617,11 +13546,6 @@
         </p:txBody>
       </p:sp>
     </p:spTree>
-    <p:extLst>
-      <p:ext uri="{BB962C8B-B14F-4D97-AF65-F5344CB8AC3E}">
-        <p14:creationId xmlns:p14="http://schemas.microsoft.com/office/powerpoint/2010/main" val="684903855"/>
-      </p:ext>
-    </p:extLst>
   </p:cSld>
   <p:clrMapOvr>
     <a:masterClrMapping/>
@@ -13648,20 +13572,14 @@
       </p:grpSpPr>
       <p:pic>
         <p:nvPicPr>
-          <p:cNvPr id="2" name="Picture 1" descr="Git Features - GeeksforGeeks">
-            <a:extLst>
-              <a:ext uri="{FF2B5EF4-FFF2-40B4-BE49-F238E27FC236}">
-                <a16:creationId xmlns:a16="http://schemas.microsoft.com/office/drawing/2014/main" id="{B76F2513-7B6D-9342-0DE7-DE788D9A4D48}"/>
-              </a:ext>
-            </a:extLst>
-          </p:cNvPr>
+          <p:cNvPr id="2" name="Picture 1" descr="Git Features - GeeksforGeeks"/>
           <p:cNvPicPr>
             <a:picLocks noChangeAspect="1"/>
           </p:cNvPicPr>
           <p:nvPr/>
         </p:nvPicPr>
         <p:blipFill>
-          <a:blip r:embed="rId2"/>
+          <a:blip r:embed="rId1"/>
           <a:stretch>
             <a:fillRect/>
           </a:stretch>
@@ -13678,13 +13596,7 @@
       </p:pic>
       <p:sp>
         <p:nvSpPr>
-          <p:cNvPr id="3" name="TextBox 2">
-            <a:extLst>
-              <a:ext uri="{FF2B5EF4-FFF2-40B4-BE49-F238E27FC236}">
-                <a16:creationId xmlns:a16="http://schemas.microsoft.com/office/drawing/2014/main" id="{2A4E359E-D93D-0618-4FC9-BB59A9650EB3}"/>
-              </a:ext>
-            </a:extLst>
-          </p:cNvPr>
+          <p:cNvPr id="3" name="TextBox 2"/>
           <p:cNvSpPr txBox="1"/>
           <p:nvPr/>
         </p:nvSpPr>
@@ -13700,9 +13612,6 @@
         </p:spPr>
         <p:txBody>
           <a:bodyPr rot="0" spcFirstLastPara="0" vertOverflow="overflow" horzOverflow="overflow" vert="horz" wrap="square" lIns="91440" tIns="45720" rIns="91440" bIns="45720" numCol="1" spcCol="0" rtlCol="0" fromWordArt="0" anchor="t" anchorCtr="0" forceAA="0" compatLnSpc="1">
-            <a:prstTxWarp prst="textNoShape">
-              <a:avLst/>
-            </a:prstTxWarp>
             <a:spAutoFit/>
           </a:bodyPr>
           <a:lstStyle/>
@@ -13714,7 +13623,7 @@
                   <a:schemeClr val="accent1"/>
                 </a:solidFill>
                 <a:latin typeface="Aptos"/>
-                <a:cs typeface="Times New Roman"/>
+                <a:cs typeface="Times New Roman" panose="02020603050405020304"/>
               </a:rPr>
               <a:t>Pictorial Representation of Distributed Version </a:t>
             </a:r>
@@ -13724,7 +13633,7 @@
                   <a:schemeClr val="accent1"/>
                 </a:solidFill>
                 <a:latin typeface="Aptos"/>
-                <a:cs typeface="Times New Roman"/>
+                <a:cs typeface="Times New Roman" panose="02020603050405020304"/>
               </a:rPr>
               <a:t>Control System</a:t>
             </a:r>
@@ -13733,17 +13642,12 @@
                 <a:schemeClr val="accent1"/>
               </a:solidFill>
               <a:latin typeface="Aptos"/>
-              <a:cs typeface="Times New Roman"/>
+              <a:cs typeface="Times New Roman" panose="02020603050405020304"/>
             </a:endParaRPr>
           </a:p>
         </p:txBody>
       </p:sp>
     </p:spTree>
-    <p:extLst>
-      <p:ext uri="{BB962C8B-B14F-4D97-AF65-F5344CB8AC3E}">
-        <p14:creationId xmlns:p14="http://schemas.microsoft.com/office/powerpoint/2010/main" val="3653248363"/>
-      </p:ext>
-    </p:extLst>
   </p:cSld>
   <p:clrMapOvr>
     <a:masterClrMapping/>
@@ -13770,13 +13674,7 @@
       </p:grpSpPr>
       <p:sp>
         <p:nvSpPr>
-          <p:cNvPr id="2" name="Title 1">
-            <a:extLst>
-              <a:ext uri="{FF2B5EF4-FFF2-40B4-BE49-F238E27FC236}">
-                <a16:creationId xmlns:a16="http://schemas.microsoft.com/office/drawing/2014/main" id="{2A03993C-ACDA-4D71-5AF2-70A2BD3B6DE0}"/>
-              </a:ext>
-            </a:extLst>
-          </p:cNvPr>
+          <p:cNvPr id="2" name="Title 1"/>
           <p:cNvSpPr>
             <a:spLocks noGrp="1"/>
           </p:cNvSpPr>
@@ -13791,8 +13689,8 @@
           <a:p>
             <a:pPr algn="ctr"/>
             <a:endParaRPr lang="en-US" sz="2400" dirty="0">
-              <a:latin typeface="Times New Roman"/>
-              <a:cs typeface="Times New Roman"/>
+              <a:latin typeface="Times New Roman" panose="02020603050405020304"/>
+              <a:cs typeface="Times New Roman" panose="02020603050405020304"/>
             </a:endParaRPr>
           </a:p>
           <a:p>
@@ -13822,13 +13720,7 @@
       </p:sp>
       <p:sp>
         <p:nvSpPr>
-          <p:cNvPr id="3" name="Content Placeholder 2">
-            <a:extLst>
-              <a:ext uri="{FF2B5EF4-FFF2-40B4-BE49-F238E27FC236}">
-                <a16:creationId xmlns:a16="http://schemas.microsoft.com/office/drawing/2014/main" id="{095A333B-A5D1-782A-FE99-A20A01BBD4EC}"/>
-              </a:ext>
-            </a:extLst>
-          </p:cNvPr>
+          <p:cNvPr id="3" name="Content Placeholder 2"/>
           <p:cNvSpPr>
             <a:spLocks noGrp="1"/>
           </p:cNvSpPr>
@@ -13869,6 +13761,10 @@
               </a:rPr>
               <a:t>GitHub acts as the shared remote repository where all developers can synchronize their work</a:t>
             </a:r>
+            <a:endParaRPr lang="en-US">
+              <a:ea typeface="+mn-lt"/>
+              <a:cs typeface="+mn-lt"/>
+            </a:endParaRPr>
           </a:p>
           <a:p>
             <a:r>
@@ -13885,6 +13781,10 @@
               </a:rPr>
               <a:t> Each developer has their own complete copy of the repository on their workstation. This includes the full history, branches, and commits.</a:t>
             </a:r>
+            <a:endParaRPr lang="en-US">
+              <a:ea typeface="+mn-lt"/>
+              <a:cs typeface="+mn-lt"/>
+            </a:endParaRPr>
           </a:p>
           <a:p>
             <a:pPr marL="0" indent="0">
@@ -13951,6 +13851,10 @@
               </a:rPr>
               <a:t> yet.</a:t>
             </a:r>
+            <a:endParaRPr lang="en-US" dirty="0">
+              <a:ea typeface="+mn-lt"/>
+              <a:cs typeface="+mn-lt"/>
+            </a:endParaRPr>
           </a:p>
           <a:p>
             <a:r>
@@ -13981,6 +13885,10 @@
               </a:rPr>
               <a:t> changes from GitHub (download). This keeps everyone’s repositories in sync.</a:t>
             </a:r>
+            <a:endParaRPr lang="en-US" dirty="0">
+              <a:ea typeface="+mn-lt"/>
+              <a:cs typeface="+mn-lt"/>
+            </a:endParaRPr>
           </a:p>
           <a:p>
             <a:pPr marL="0" indent="0">
@@ -13994,11 +13902,6 @@
         </p:txBody>
       </p:sp>
     </p:spTree>
-    <p:extLst>
-      <p:ext uri="{BB962C8B-B14F-4D97-AF65-F5344CB8AC3E}">
-        <p14:creationId xmlns:p14="http://schemas.microsoft.com/office/powerpoint/2010/main" val="83090081"/>
-      </p:ext>
-    </p:extLst>
   </p:cSld>
   <p:clrMapOvr>
     <a:masterClrMapping/>
@@ -14049,7 +13952,7 @@
     </a:clrScheme>
     <a:fontScheme name="Ion Boardroom">
       <a:majorFont>
-        <a:latin typeface="Century Gothic" panose="020B0502020202020204"/>
+        <a:latin typeface="Century Gothic"/>
         <a:ea typeface=""/>
         <a:cs typeface=""/>
         <a:font script="Jpan" typeface="メイリオ"/>
@@ -14084,7 +13987,7 @@
         <a:font script="Geor" typeface="Sylfaen"/>
       </a:majorFont>
       <a:minorFont>
-        <a:latin typeface="Century Gothic" panose="020B0502020202020204"/>
+        <a:latin typeface="Century Gothic"/>
         <a:ea typeface=""/>
         <a:cs typeface=""/>
         <a:font script="Jpan" typeface="メイリオ"/>
@@ -14255,16 +14158,16 @@
               </a:schemeClr>
             </a:duotone>
           </a:blip>
-          <a:stretch/>
+          <a:stretch>
+            <a:fillRect/>
+          </a:stretch>
         </a:blipFill>
       </a:bgFillStyleLst>
     </a:fmtScheme>
   </a:themeElements>
-  <a:objectDefaults/>
-  <a:extraClrSchemeLst/>
   <a:extLst>
     <a:ext uri="{05A4C25C-085E-4340-85A3-A5531E510DB2}">
-      <thm15:themeFamily xmlns:thm15="http://schemas.microsoft.com/office/thememl/2012/main" name="Ion Boardroom" id="{FC33163D-4339-46B1-8EED-24C834239D99}" vid="{B8502691-933B-45FE-8764-BA278511EF27}"/>
+      <thm15:themeFamily xmlns:thm15="http://schemas.microsoft.com/office/thememl/2012/main" name="Office Theme" id="{62F939B6-93AF-4DB8-9C6B-D6C7DFDC589F}" vid="{4A3C46E8-61CC-4603-A589-7422A47A8E4A}"/>
     </a:ext>
   </a:extLst>
 </a:theme>

--- a/my_folder/Presentation (1).pptx
+++ b/my_folder/Presentation (1).pptx
@@ -13518,7 +13518,7 @@
           <a:p>
             <a:r>
               <a:rPr lang="en-US"/>
-              <a:t>ssssss repo.</a:t>
+              <a:t>ssssss repo.hi i am shivakrishnan</a:t>
             </a:r>
             <a:endParaRPr lang="en-US" dirty="0"/>
           </a:p>

--- a/my_folder/Presentation (1).pptx
+++ b/my_folder/Presentation (1).pptx
@@ -13518,7 +13518,7 @@
           <a:p>
             <a:r>
               <a:rPr lang="en-US"/>
-              <a:t>ssssss repo.hi i am shivakrishnan</a:t>
+              <a:t>ssssss repo.hi i am shivakrishnan.edited twice</a:t>
             </a:r>
             <a:endParaRPr lang="en-US" dirty="0"/>
           </a:p>

--- a/my_folder/Presentation (1).pptx
+++ b/my_folder/Presentation (1).pptx
@@ -13518,7 +13518,7 @@
           <a:p>
             <a:r>
               <a:rPr lang="en-US"/>
-              <a:t>ssssss repo.</a:t>
+              <a:t>ssssss repo. hi</a:t>
             </a:r>
             <a:endParaRPr lang="en-US" dirty="0"/>
           </a:p>

--- a/my_folder/Presentation (1).pptx
+++ b/my_folder/Presentation (1).pptx
@@ -13520,6 +13520,15 @@
               <a:rPr lang="en-US"/>
               <a:t>ssssss repo.hi i am shivakrishnan.edited twice</a:t>
             </a:r>
+            <a:endParaRPr lang="en-US"/>
+          </a:p>
+          <a:p>
+            <a:r>
+              <a:rPr lang="en-US">
+                <a:sym typeface="+mn-ea"/>
+              </a:rPr>
+              <a:t>ssssss repo.hi i am shivakrishnan.edited twice</a:t>
+            </a:r>
             <a:endParaRPr lang="en-US" dirty="0"/>
           </a:p>
           <a:p>

--- a/my_folder/Presentation (1).pptx
+++ b/my_folder/Presentation (1).pptx
@@ -13518,16 +13518,7 @@
           <a:p>
             <a:r>
               <a:rPr lang="en-US"/>
-              <a:t>ssssss repo.hi i am shivakrishnan.edited twice</a:t>
-            </a:r>
-            <a:endParaRPr lang="en-US"/>
-          </a:p>
-          <a:p>
-            <a:r>
-              <a:rPr lang="en-US">
-                <a:sym typeface="+mn-ea"/>
-              </a:rPr>
-              <a:t>ssssss repo.hi i am shivakrishnan.edited twice</a:t>
+              <a:t>ssssss repo.hi i am shivakrishnan.edited twice.we are creating conflict</a:t>
             </a:r>
             <a:endParaRPr lang="en-US" dirty="0"/>
           </a:p>
